--- a/StellarLend_Pitch_Deck.pptx
+++ b/StellarLend_Pitch_Deck.pptx
@@ -2181,7 +2181,15 @@
                   <a:srgbClr val="9CA3AF"/>
                 </a:solidFill>
               </a:rPr>
-              <a:t>github.com/ashishh-tech/Stellar-Peer-to-Peer-Lending</a:t>
+              <a:t>github.com/ashishh-tech</a:t>
+            </a:r>
+            <a:r>
+              <a:rPr lang="en-US" sz="1200">
+                <a:solidFill>
+                  <a:srgbClr val="9CA3AF"/>
+                </a:solidFill>
+              </a:rPr>
+              <a:t>/STELLARLEND</a:t>
             </a:r>
             <a:endParaRPr lang="en-US" sz="1200" dirty="0"/>
           </a:p>
